--- a/Courses/CSCE713-Software-Security/Slides/M04-Injection-and-Parsing.pptx
+++ b/Courses/CSCE713-Software-Security/Slides/M04-Injection-and-Parsing.pptx
@@ -3952,7 +3952,7 @@
                 </a:solidFill>
                 <a:latin typeface="Calibri"/>
               </a:rPr>
-              <a:t>CSCE 713 · Module 04 of 8 · original material, share freely</a:t>
+              <a:t>CSCE 713 · Module 04 of 13 · original material, share freely</a:t>
             </a:r>
           </a:p>
         </p:txBody>
